--- a/lectures/b07/ppt/b07-l04.pptx
+++ b/lectures/b07/ppt/b07-l04.pptx
@@ -4655,7 +4655,7 @@
                 <a:ea typeface="Malgun Gothic"/>
                 <a:cs typeface="Malgun Gothic"/>
               </a:rPr>
-              <a:t>질환: 알츠하이머(B08 L04), 신경병증성 통증(척수 후각 미세아교세포 활성), 나수-하콜라병(TREM2/TYROBP — 골낭종 + 치매), CSF1R 관련 백질뇌병증(ALSP — 성인 치매·보행 장애 → 조혈모세포이식 시도).</a:t>
+              <a:t>질환: 알츠하이머(B08 L07), 신경병증성 통증(척수 후각 미세아교세포 활성), 나수-하콜라병(TREM2/TYROBP — 골낭종 + 치매), CSF1R 관련 백질뇌병증(ALSP — 성인 치매·보행 장애 → 조혈모세포이식 시도).</a:t>
             </a:r>
           </a:p>
           <a:p>
